--- a/dist/초1/과학/계절과자연/초1_과학_계절과자연_01_계절과날씨기록_학생용.pptx
+++ b/dist/초1/과학/계절과자연/초1_과학_계절과자연_01_계절과날씨기록_학생용.pptx
@@ -119,20 +119,20 @@
   <p:extLst>
     <p:ext uri="{521415D9-36F7-43E2-AB2F-B90AF26B5E84}">
       <p14:sectionLst xmlns:p14="http://schemas.microsoft.com/office/powerpoint/2010/main">
-        <p14:section name="도입" id="{03d084ae-d18f-d867-87bf-58a0fe9a4fbc}">
+        <p14:section name="도입" id="{674e8dc3-7d2f-54c5-0669-a2732c166e6e}">
           <p14:sldIdLst>
             <p14:sldId id="256"/>
             <p14:sldId id="257"/>
           </p14:sldIdLst>
         </p14:section>
-        <p14:section name="개념" id="{f11a4939-9e26-8500-5caa-10d196929438}">
+        <p14:section name="개념" id="{ae2d1744-3f68-c977-f94c-3f53226732d9}">
           <p14:sldIdLst>
             <p14:sldId id="258"/>
             <p14:sldId id="261"/>
             <p14:sldId id="265"/>
           </p14:sldIdLst>
         </p14:section>
-        <p14:section name="연습" id="{c142ad4f-f365-ec00-f97f-5ef4ea46cac0}">
+        <p14:section name="연습" id="{92862615-edac-6d40-fe31-77ccf486f218}">
           <p14:sldIdLst>
             <p14:sldId id="259"/>
             <p14:sldId id="260"/>
@@ -141,26 +141,26 @@
             <p14:sldId id="264"/>
           </p14:sldIdLst>
         </p14:section>
-        <p14:section name="개념" id="{cc6bca11-cdb0-2c23-4682-e28decfda4f1}">
+        <p14:section name="개념" id="{f9386e96-9208-877a-589a-17c4f546bf91}">
           <p14:sldIdLst/>
         </p14:section>
-        <p14:section name="연습" id="{a367a1ca-1e73-e860-d1aa-acfa9df17022}">
+        <p14:section name="연습" id="{6b4cdbb3-05cd-50a6-0f10-b2914f80cf49}">
           <p14:sldIdLst/>
         </p14:section>
-        <p14:section name="개념" id="{9ae84f1a-e946-c6ca-c4d2-73608166c766}">
+        <p14:section name="개념" id="{592e9a9b-f442-eaef-0c86-05ae4a5a93ba}">
           <p14:sldIdLst/>
         </p14:section>
-        <p14:section name="확인" id="{9b345310-fff5-22b2-4712-3f762ae8b8ae}">
+        <p14:section name="확인" id="{e403ccc5-71b3-723f-ceb9-e41f88140865}">
           <p14:sldIdLst>
             <p14:sldId id="266"/>
           </p14:sldIdLst>
         </p14:section>
-        <p14:section name="정리" id="{15659551-1b29-71b2-978f-b1ae350a44d2}">
+        <p14:section name="정리" id="{87e1980d-71e8-a3ce-92db-016f02200f3a}">
           <p14:sldIdLst>
             <p14:sldId id="267"/>
           </p14:sldIdLst>
         </p14:section>
-        <p14:section name="보충" id="{1c526146-16d3-31fc-2267-8bbd79d2f911}">
+        <p14:section name="보충" id="{92fa80cb-9bb9-9615-74ce-51d1e76ddeac}">
           <p14:sldIdLst>
             <p14:sldId id="268"/>
           </p14:sldIdLst>
